--- a/Lupe_Investor_Deck.pptx
+++ b/Lupe_Investor_Deck.pptx
@@ -4748,7 +4748,7 @@
         </p:nvSpPr>
         <p:spPr>
           <a:xfrm>
-            <a:off x="731520" y="822960"/>
+            <a:off x="731520" y="588552"/>
             <a:ext cx="10058400" cy="640080"/>
           </a:xfrm>
           <a:prstGeom prst="rect">
@@ -4771,6 +4771,7 @@
               </a:defRPr>
             </a:pPr>
             <a:r>
+              <a:rPr dirty="0"/>
               <a:t>From €100K ARR Today — Phased Ramp from 35 Researched Leads</a:t>
             </a:r>
           </a:p>
@@ -4828,7 +4829,7 @@
         </p:nvSpPr>
         <p:spPr>
           <a:xfrm>
-            <a:off x="914400" y="1600200"/>
+            <a:off x="731520" y="1600200"/>
             <a:ext cx="10058400" cy="365760"/>
           </a:xfrm>
           <a:prstGeom prst="rect">
@@ -4851,6 +4852,7 @@
               </a:defRPr>
             </a:pPr>
             <a:r>
+              <a:rPr dirty="0"/>
               <a:t>Starting point: €100K ARR from existing clients (attribution models + AI pilot)</a:t>
             </a:r>
           </a:p>
@@ -7226,7 +7228,7 @@
               </a:defRPr>
             </a:pPr>
             <a:r>
-              <a:t>12+ months, founder-built</a:t>
+              <a:t>Founder-built, competes with client work</a:t>
             </a:r>
           </a:p>
         </p:txBody>
@@ -7298,7 +7300,7 @@
               </a:defRPr>
             </a:pPr>
             <a:r>
-              <a:t>Weeks per client (manual models)</a:t>
+              <a:t>Weeks per client (manual + untested)</a:t>
             </a:r>
           </a:p>
         </p:txBody>
@@ -7514,7 +7516,7 @@
               </a:defRPr>
             </a:pPr>
             <a:r>
-              <a:t>Part-time / contractor basis</a:t>
+              <a:t>Part-time, trains agents when available</a:t>
             </a:r>
           </a:p>
         </p:txBody>
@@ -7594,7 +7596,7 @@
               </a:defRPr>
             </a:pPr>
             <a:r>
-              <a:t>FUNDED (€500K-1M)</a:t>
+              <a:t>FUNDED (€250-300K)</a:t>
             </a:r>
           </a:p>
         </p:txBody>
@@ -7810,7 +7812,7 @@
               </a:defRPr>
             </a:pPr>
             <a:r>
-              <a:t>4-6 months, accelerated</a:t>
+              <a:t>Dedicated full-stack dev, 4-6 months</a:t>
             </a:r>
           </a:p>
         </p:txBody>
@@ -7882,7 +7884,7 @@
               </a:defRPr>
             </a:pPr>
             <a:r>
-              <a:t>Days (automated models)</a:t>
+              <a:t>Days (automated + tested)</a:t>
             </a:r>
           </a:p>
         </p:txBody>
@@ -8098,7 +8100,7 @@
               </a:defRPr>
             </a:pPr>
             <a:r>
-              <a:t>Ad Tech expert — full-time</a:t>
+              <a:t>Full-time — trains agents, builds core features</a:t>
             </a:r>
           </a:p>
         </p:txBody>
@@ -8816,7 +8818,7 @@
               </a:defRPr>
             </a:pPr>
             <a:r>
-              <a:t>Seed Round: €500K – €1M</a:t>
+              <a:t>Seed Round: €250K – €300K</a:t>
             </a:r>
           </a:p>
         </p:txBody>
@@ -8844,65 +8846,383 @@
           <a:lstStyle/>
           <a:p>
             <a:pPr algn="l">
+              <a:defRPr sz="2200" b="1">
+                <a:solidFill>
+                  <a:srgbClr val="007AFF"/>
+                </a:solidFill>
+                <a:latin typeface="Calibri"/>
+              </a:defRPr>
+            </a:pPr>
+            <a:r>
+              <a:t>We don't need much. We need time.</a:t>
+            </a:r>
+          </a:p>
+        </p:txBody>
+      </p:sp>
+      <p:sp>
+        <p:nvSpPr>
+          <p:cNvPr id="5" name="Rectangle 4"/>
+          <p:cNvSpPr/>
+          <p:nvPr/>
+        </p:nvSpPr>
+        <p:spPr>
+          <a:xfrm>
+            <a:off x="731520" y="2468880"/>
+            <a:ext cx="5029200" cy="2743200"/>
+          </a:xfrm>
+          <a:prstGeom prst="rect">
+            <a:avLst/>
+          </a:prstGeom>
+          <a:solidFill>
+            <a:srgbClr val="22223A"/>
+          </a:solidFill>
+          <a:ln>
+            <a:noFill/>
+          </a:ln>
+        </p:spPr>
+        <p:style>
+          <a:lnRef idx="1">
+            <a:schemeClr val="accent1"/>
+          </a:lnRef>
+          <a:fillRef idx="3">
+            <a:schemeClr val="accent1"/>
+          </a:fillRef>
+          <a:effectRef idx="2">
+            <a:schemeClr val="accent1"/>
+          </a:effectRef>
+          <a:fontRef idx="minor">
+            <a:schemeClr val="lt1"/>
+          </a:fontRef>
+        </p:style>
+        <p:txBody>
+          <a:bodyPr rtlCol="0" anchor="ctr"/>
+          <a:lstStyle/>
+          <a:p>
+            <a:pPr algn="ctr"/>
+            <a:endParaRPr/>
+          </a:p>
+        </p:txBody>
+      </p:sp>
+      <p:sp>
+        <p:nvSpPr>
+          <p:cNvPr id="6" name="TextBox 5"/>
+          <p:cNvSpPr txBox="1"/>
+          <p:nvPr/>
+        </p:nvSpPr>
+        <p:spPr>
+          <a:xfrm>
+            <a:off x="1005840" y="2606040"/>
+            <a:ext cx="4572000" cy="365760"/>
+          </a:xfrm>
+          <a:prstGeom prst="rect">
+            <a:avLst/>
+          </a:prstGeom>
+          <a:noFill/>
+        </p:spPr>
+        <p:txBody>
+          <a:bodyPr wrap="square">
+            <a:spAutoFit/>
+          </a:bodyPr>
+          <a:lstStyle/>
+          <a:p>
+            <a:pPr algn="l">
               <a:defRPr sz="2000" b="1">
                 <a:solidFill>
+                  <a:srgbClr val="00C97B"/>
+                </a:solidFill>
+                <a:latin typeface="Calibri"/>
+              </a:defRPr>
+            </a:pPr>
+            <a:r>
+              <a:t>Hire 1: Full-Stack Developer</a:t>
+            </a:r>
+          </a:p>
+        </p:txBody>
+      </p:sp>
+      <p:sp>
+        <p:nvSpPr>
+          <p:cNvPr id="7" name="TextBox 6"/>
+          <p:cNvSpPr txBox="1"/>
+          <p:nvPr/>
+        </p:nvSpPr>
+        <p:spPr>
+          <a:xfrm>
+            <a:off x="1005840" y="3063240"/>
+            <a:ext cx="4572000" cy="1920240"/>
+          </a:xfrm>
+          <a:prstGeom prst="rect">
+            <a:avLst/>
+          </a:prstGeom>
+          <a:noFill/>
+        </p:spPr>
+        <p:txBody>
+          <a:bodyPr wrap="square">
+            <a:spAutoFit/>
+          </a:bodyPr>
+          <a:lstStyle/>
+          <a:p>
+            <a:pPr algn="l">
+              <a:defRPr sz="1400" b="0">
+                <a:solidFill>
+                  <a:srgbClr val="FFFFFF"/>
+                </a:solidFill>
+                <a:latin typeface="Calibri"/>
+              </a:defRPr>
+            </a:pPr>
+            <a:r>
+              <a:t>QA testing, reliability engineering, CI/CD automation,</a:t>
+            </a:r>
+            <a:br/>
+            <a:r>
+              <a:t>and the onboarding agent that takes new clients</a:t>
+            </a:r>
+            <a:br/>
+            <a:r>
+              <a:t>from weeks to days.</a:t>
+            </a:r>
+            <a:br/>
+            <a:br/>
+            <a:r>
+              <a:t>The bottleneck today: founder splits time between</a:t>
+            </a:r>
+            <a:br/>
+            <a:r>
+              <a:t>client delivery, features, and infrastructure.</a:t>
+            </a:r>
+            <a:br/>
+            <a:r>
+              <a:t>This hire unblocks all three.</a:t>
+            </a:r>
+          </a:p>
+        </p:txBody>
+      </p:sp>
+      <p:sp>
+        <p:nvSpPr>
+          <p:cNvPr id="8" name="Rectangle 7"/>
+          <p:cNvSpPr/>
+          <p:nvPr/>
+        </p:nvSpPr>
+        <p:spPr>
+          <a:xfrm>
+            <a:off x="6217920" y="2468880"/>
+            <a:ext cx="5029200" cy="2743200"/>
+          </a:xfrm>
+          <a:prstGeom prst="rect">
+            <a:avLst/>
+          </a:prstGeom>
+          <a:solidFill>
+            <a:srgbClr val="22223A"/>
+          </a:solidFill>
+          <a:ln>
+            <a:noFill/>
+          </a:ln>
+        </p:spPr>
+        <p:style>
+          <a:lnRef idx="1">
+            <a:schemeClr val="accent1"/>
+          </a:lnRef>
+          <a:fillRef idx="3">
+            <a:schemeClr val="accent1"/>
+          </a:fillRef>
+          <a:effectRef idx="2">
+            <a:schemeClr val="accent1"/>
+          </a:effectRef>
+          <a:fontRef idx="minor">
+            <a:schemeClr val="lt1"/>
+          </a:fontRef>
+        </p:style>
+        <p:txBody>
+          <a:bodyPr rtlCol="0" anchor="ctr"/>
+          <a:lstStyle/>
+          <a:p>
+            <a:pPr algn="ctr"/>
+            <a:endParaRPr/>
+          </a:p>
+        </p:txBody>
+      </p:sp>
+      <p:sp>
+        <p:nvSpPr>
+          <p:cNvPr id="9" name="TextBox 8"/>
+          <p:cNvSpPr txBox="1"/>
+          <p:nvPr/>
+        </p:nvSpPr>
+        <p:spPr>
+          <a:xfrm>
+            <a:off x="6492240" y="2606040"/>
+            <a:ext cx="4572000" cy="365760"/>
+          </a:xfrm>
+          <a:prstGeom prst="rect">
+            <a:avLst/>
+          </a:prstGeom>
+          <a:noFill/>
+        </p:spPr>
+        <p:txBody>
+          <a:bodyPr wrap="square">
+            <a:spAutoFit/>
+          </a:bodyPr>
+          <a:lstStyle/>
+          <a:p>
+            <a:pPr algn="l">
+              <a:defRPr sz="2000" b="1">
+                <a:solidFill>
+                  <a:srgbClr val="00C97B"/>
+                </a:solidFill>
+                <a:latin typeface="Calibri"/>
+              </a:defRPr>
+            </a:pPr>
+            <a:r>
+              <a:t>Hire 2: Ad Tech Expert (Full-Time)</a:t>
+            </a:r>
+          </a:p>
+        </p:txBody>
+      </p:sp>
+      <p:sp>
+        <p:nvSpPr>
+          <p:cNvPr id="10" name="TextBox 9"/>
+          <p:cNvSpPr txBox="1"/>
+          <p:nvPr/>
+        </p:nvSpPr>
+        <p:spPr>
+          <a:xfrm>
+            <a:off x="6492240" y="3063240"/>
+            <a:ext cx="4572000" cy="1920240"/>
+          </a:xfrm>
+          <a:prstGeom prst="rect">
+            <a:avLst/>
+          </a:prstGeom>
+          <a:noFill/>
+        </p:spPr>
+        <p:txBody>
+          <a:bodyPr wrap="square">
+            <a:spAutoFit/>
+          </a:bodyPr>
+          <a:lstStyle/>
+          <a:p>
+            <a:pPr algn="l">
+              <a:defRPr sz="1400" b="0">
+                <a:solidFill>
+                  <a:srgbClr val="FFFFFF"/>
+                </a:solidFill>
+                <a:latin typeface="Calibri"/>
+              </a:defRPr>
+            </a:pPr>
+            <a:r>
+              <a:t>Currently part-time — already training daily &amp; weekly</a:t>
+            </a:r>
+            <a:br/>
+            <a:r>
+              <a:t>reporting agents and building core features:</a:t>
+            </a:r>
+            <a:br/>
+            <a:r>
+              <a:t>network suggestions, campaign optimization.</a:t>
+            </a:r>
+            <a:br/>
+            <a:br/>
+            <a:r>
+              <a:t>Full-time unlocks: Deeper agent training,</a:t>
+            </a:r>
+            <a:br/>
+            <a:r>
+              <a:t>cross-client intelligence, reliable reporting</a:t>
+            </a:r>
+            <a:br/>
+            <a:r>
+              <a:t>that clients trust to act on.</a:t>
+            </a:r>
+          </a:p>
+        </p:txBody>
+      </p:sp>
+      <p:sp>
+        <p:nvSpPr>
+          <p:cNvPr id="11" name="Rectangle 10"/>
+          <p:cNvSpPr/>
+          <p:nvPr/>
+        </p:nvSpPr>
+        <p:spPr>
+          <a:xfrm>
+            <a:off x="731520" y="5486400"/>
+            <a:ext cx="10515600" cy="914400"/>
+          </a:xfrm>
+          <a:prstGeom prst="rect">
+            <a:avLst/>
+          </a:prstGeom>
+          <a:solidFill>
+            <a:srgbClr val="22223A"/>
+          </a:solidFill>
+          <a:ln>
+            <a:noFill/>
+          </a:ln>
+        </p:spPr>
+        <p:style>
+          <a:lnRef idx="1">
+            <a:schemeClr val="accent1"/>
+          </a:lnRef>
+          <a:fillRef idx="3">
+            <a:schemeClr val="accent1"/>
+          </a:fillRef>
+          <a:effectRef idx="2">
+            <a:schemeClr val="accent1"/>
+          </a:effectRef>
+          <a:fontRef idx="minor">
+            <a:schemeClr val="lt1"/>
+          </a:fontRef>
+        </p:style>
+        <p:txBody>
+          <a:bodyPr rtlCol="0" anchor="ctr"/>
+          <a:lstStyle/>
+          <a:p>
+            <a:pPr algn="ctr"/>
+            <a:endParaRPr/>
+          </a:p>
+        </p:txBody>
+      </p:sp>
+      <p:sp>
+        <p:nvSpPr>
+          <p:cNvPr id="12" name="TextBox 11"/>
+          <p:cNvSpPr txBox="1"/>
+          <p:nvPr/>
+        </p:nvSpPr>
+        <p:spPr>
+          <a:xfrm>
+            <a:off x="914400" y="5532120"/>
+            <a:ext cx="10058400" cy="365760"/>
+          </a:xfrm>
+          <a:prstGeom prst="rect">
+            <a:avLst/>
+          </a:prstGeom>
+          <a:noFill/>
+        </p:spPr>
+        <p:txBody>
+          <a:bodyPr wrap="square">
+            <a:spAutoFit/>
+          </a:bodyPr>
+          <a:lstStyle/>
+          <a:p>
+            <a:pPr algn="l">
+              <a:defRPr sz="1500" b="1">
+                <a:solidFill>
                   <a:srgbClr val="007AFF"/>
                 </a:solidFill>
                 <a:latin typeface="Calibri"/>
               </a:defRPr>
             </a:pPr>
             <a:r>
-              <a:t>Use of funds:</a:t>
-            </a:r>
-          </a:p>
-        </p:txBody>
-      </p:sp>
-      <p:sp>
-        <p:nvSpPr>
-          <p:cNvPr id="5" name="TextBox 4"/>
-          <p:cNvSpPr txBox="1"/>
-          <p:nvPr/>
-        </p:nvSpPr>
-        <p:spPr>
-          <a:xfrm>
-            <a:off x="914400" y="2286000"/>
-            <a:ext cx="10058400" cy="320040"/>
-          </a:xfrm>
-          <a:prstGeom prst="rect">
-            <a:avLst/>
-          </a:prstGeom>
-          <a:noFill/>
-        </p:spPr>
-        <p:txBody>
-          <a:bodyPr wrap="square">
-            <a:spAutoFit/>
-          </a:bodyPr>
-          <a:lstStyle/>
-          <a:p>
-            <a:pPr algn="l">
-              <a:defRPr sz="1700" b="1">
-                <a:solidFill>
-                  <a:srgbClr val="00C97B"/>
-                </a:solidFill>
-                <a:latin typeface="Calibri"/>
-              </a:defRPr>
-            </a:pPr>
-            <a:r>
-              <a:t>1. Ad Tech Expert (First Hire)</a:t>
-            </a:r>
-          </a:p>
-        </p:txBody>
-      </p:sp>
-      <p:sp>
-        <p:nvSpPr>
-          <p:cNvPr id="6" name="TextBox 5"/>
-          <p:cNvSpPr txBox="1"/>
-          <p:nvPr/>
-        </p:nvSpPr>
-        <p:spPr>
-          <a:xfrm>
-            <a:off x="914400" y="2606040"/>
-            <a:ext cx="10058400" cy="594360"/>
+              <a:t>The math: 2 salaries × 12 months + buffer = €250-300K  |  Current ARR: €100K  |  Target: 3x ARR in 12 months</a:t>
+            </a:r>
+          </a:p>
+        </p:txBody>
+      </p:sp>
+      <p:sp>
+        <p:nvSpPr>
+          <p:cNvPr id="13" name="TextBox 12"/>
+          <p:cNvSpPr txBox="1"/>
+          <p:nvPr/>
+        </p:nvSpPr>
+        <p:spPr>
+          <a:xfrm>
+            <a:off x="914400" y="5897880"/>
+            <a:ext cx="10058400" cy="365760"/>
           </a:xfrm>
           <a:prstGeom prst="rect">
             <a:avLst/>
@@ -8918,266 +9238,13 @@
             <a:pPr algn="l">
               <a:defRPr sz="1300" b="0">
                 <a:solidFill>
-                  <a:srgbClr val="FFFFFF"/>
-                </a:solidFill>
-                <a:latin typeface="Calibri"/>
-              </a:defRPr>
-            </a:pPr>
-            <a:r>
-              <a:t>Full-time domain specialist. Currently assisting part-time — training reporting agents, building network suggestion system. With funding: dedicated hire to accelerate cross-client intelligence, deepen campaign optimization, and train agents on network-level strategy. This is the highest-leverage hire — domain knowledge is what makes our agents smarter than generic AI.</a:t>
-            </a:r>
-          </a:p>
-        </p:txBody>
-      </p:sp>
-      <p:sp>
-        <p:nvSpPr>
-          <p:cNvPr id="7" name="TextBox 6"/>
-          <p:cNvSpPr txBox="1"/>
-          <p:nvPr/>
-        </p:nvSpPr>
-        <p:spPr>
-          <a:xfrm>
-            <a:off x="914400" y="3291840"/>
-            <a:ext cx="10058400" cy="320040"/>
-          </a:xfrm>
-          <a:prstGeom prst="rect">
-            <a:avLst/>
-          </a:prstGeom>
-          <a:noFill/>
-        </p:spPr>
-        <p:txBody>
-          <a:bodyPr wrap="square">
-            <a:spAutoFit/>
-          </a:bodyPr>
-          <a:lstStyle/>
-          <a:p>
-            <a:pPr algn="l">
-              <a:defRPr sz="1700" b="1">
-                <a:solidFill>
-                  <a:srgbClr val="00C97B"/>
-                </a:solidFill>
-                <a:latin typeface="Calibri"/>
-              </a:defRPr>
-            </a:pPr>
-            <a:r>
-              <a:t>2. Coding Agent Acceleration</a:t>
-            </a:r>
-          </a:p>
-        </p:txBody>
-      </p:sp>
-      <p:sp>
-        <p:nvSpPr>
-          <p:cNvPr id="8" name="TextBox 7"/>
-          <p:cNvSpPr txBox="1"/>
-          <p:nvPr/>
-        </p:nvSpPr>
-        <p:spPr>
-          <a:xfrm>
-            <a:off x="914400" y="3611880"/>
-            <a:ext cx="10058400" cy="594360"/>
-          </a:xfrm>
-          <a:prstGeom prst="rect">
-            <a:avLst/>
-          </a:prstGeom>
-          <a:noFill/>
-        </p:spPr>
-        <p:txBody>
-          <a:bodyPr wrap="square">
-            <a:spAutoFit/>
-          </a:bodyPr>
-          <a:lstStyle/>
-          <a:p>
-            <a:pPr algn="l">
-              <a:defRPr sz="1300" b="0">
-                <a:solidFill>
-                  <a:srgbClr val="FFFFFF"/>
-                </a:solidFill>
-                <a:latin typeface="Calibri"/>
-              </a:defRPr>
-            </a:pPr>
-            <a:r>
-              <a:t>Break the onboarding bottleneck. Today: custom dbt models take weeks, built semi-manually with internal coding agents. With funding: dedicated engineering sprint to ship Coding Agent v1 — automated model generation, CI/CD deployment, days-not-weeks per new client.</a:t>
-            </a:r>
-          </a:p>
-        </p:txBody>
-      </p:sp>
-      <p:sp>
-        <p:nvSpPr>
-          <p:cNvPr id="9" name="TextBox 8"/>
-          <p:cNvSpPr txBox="1"/>
-          <p:nvPr/>
-        </p:nvSpPr>
-        <p:spPr>
-          <a:xfrm>
-            <a:off x="914400" y="4297680"/>
-            <a:ext cx="10058400" cy="320040"/>
-          </a:xfrm>
-          <a:prstGeom prst="rect">
-            <a:avLst/>
-          </a:prstGeom>
-          <a:noFill/>
-        </p:spPr>
-        <p:txBody>
-          <a:bodyPr wrap="square">
-            <a:spAutoFit/>
-          </a:bodyPr>
-          <a:lstStyle/>
-          <a:p>
-            <a:pPr algn="l">
-              <a:defRPr sz="1700" b="1">
-                <a:solidFill>
-                  <a:srgbClr val="00C97B"/>
-                </a:solidFill>
-                <a:latin typeface="Calibri"/>
-              </a:defRPr>
-            </a:pPr>
-            <a:r>
-              <a:t>3. Sales &amp; Pipeline Conversion</a:t>
-            </a:r>
-          </a:p>
-        </p:txBody>
-      </p:sp>
-      <p:sp>
-        <p:nvSpPr>
-          <p:cNvPr id="10" name="TextBox 9"/>
-          <p:cNvSpPr txBox="1"/>
-          <p:nvPr/>
-        </p:nvSpPr>
-        <p:spPr>
-          <a:xfrm>
-            <a:off x="914400" y="4617720"/>
-            <a:ext cx="10058400" cy="594360"/>
-          </a:xfrm>
-          <a:prstGeom prst="rect">
-            <a:avLst/>
-          </a:prstGeom>
-          <a:noFill/>
-        </p:spPr>
-        <p:txBody>
-          <a:bodyPr wrap="square">
-            <a:spAutoFit/>
-          </a:bodyPr>
-          <a:lstStyle/>
-          <a:p>
-            <a:pPr algn="l">
-              <a:defRPr sz="1300" b="0">
-                <a:solidFill>
-                  <a:srgbClr val="FFFFFF"/>
-                </a:solidFill>
-                <a:latin typeface="Calibri"/>
-              </a:defRPr>
-            </a:pPr>
-            <a:r>
-              <a:t>Convert the 35-lead pipeline. Structured outreach, founder-led enterprise sales, expand from DACH into Nordics and UK. Every month we delay, competitors start building.</a:t>
-            </a:r>
-          </a:p>
-        </p:txBody>
-      </p:sp>
-      <p:sp>
-        <p:nvSpPr>
-          <p:cNvPr id="11" name="TextBox 10"/>
-          <p:cNvSpPr txBox="1"/>
-          <p:nvPr/>
-        </p:nvSpPr>
-        <p:spPr>
-          <a:xfrm>
-            <a:off x="914400" y="5303520"/>
-            <a:ext cx="10058400" cy="320040"/>
-          </a:xfrm>
-          <a:prstGeom prst="rect">
-            <a:avLst/>
-          </a:prstGeom>
-          <a:noFill/>
-        </p:spPr>
-        <p:txBody>
-          <a:bodyPr wrap="square">
-            <a:spAutoFit/>
-          </a:bodyPr>
-          <a:lstStyle/>
-          <a:p>
-            <a:pPr algn="l">
-              <a:defRPr sz="1700" b="1">
-                <a:solidFill>
-                  <a:srgbClr val="00C97B"/>
-                </a:solidFill>
-                <a:latin typeface="Calibri"/>
-              </a:defRPr>
-            </a:pPr>
-            <a:r>
-              <a:t>4. Infrastructure &amp; Compliance</a:t>
-            </a:r>
-          </a:p>
-        </p:txBody>
-      </p:sp>
-      <p:sp>
-        <p:nvSpPr>
-          <p:cNvPr id="12" name="TextBox 11"/>
-          <p:cNvSpPr txBox="1"/>
-          <p:nvPr/>
-        </p:nvSpPr>
-        <p:spPr>
-          <a:xfrm>
-            <a:off x="914400" y="5623560"/>
-            <a:ext cx="10058400" cy="594360"/>
-          </a:xfrm>
-          <a:prstGeom prst="rect">
-            <a:avLst/>
-          </a:prstGeom>
-          <a:noFill/>
-        </p:spPr>
-        <p:txBody>
-          <a:bodyPr wrap="square">
-            <a:spAutoFit/>
-          </a:bodyPr>
-          <a:lstStyle/>
-          <a:p>
-            <a:pPr algn="l">
-              <a:defRPr sz="1300" b="0">
-                <a:solidFill>
-                  <a:srgbClr val="FFFFFF"/>
-                </a:solidFill>
-                <a:latin typeface="Calibri"/>
-              </a:defRPr>
-            </a:pPr>
-            <a:r>
-              <a:t>Multi-tenant scaling, SOC2 compliance, enterprise security. Required to close Enterprise Large clients (Delivery Hero, Bolt, N26-class).</a:t>
-            </a:r>
-          </a:p>
-        </p:txBody>
-      </p:sp>
-      <p:sp>
-        <p:nvSpPr>
-          <p:cNvPr id="13" name="TextBox 12"/>
-          <p:cNvSpPr txBox="1"/>
-          <p:nvPr/>
-        </p:nvSpPr>
-        <p:spPr>
-          <a:xfrm>
-            <a:off x="731520" y="6080760"/>
-            <a:ext cx="10515600" cy="457200"/>
-          </a:xfrm>
-          <a:prstGeom prst="rect">
-            <a:avLst/>
-          </a:prstGeom>
-          <a:noFill/>
-        </p:spPr>
-        <p:txBody>
-          <a:bodyPr wrap="square">
-            <a:spAutoFit/>
-          </a:bodyPr>
-          <a:lstStyle/>
-          <a:p>
-            <a:pPr algn="l">
-              <a:defRPr sz="1500" b="1">
-                <a:solidFill>
-                  <a:srgbClr val="007AFF"/>
-                </a:solidFill>
-                <a:latin typeface="Calibri"/>
-              </a:defRPr>
-            </a:pPr>
-            <a:r>
-              <a:rPr dirty="0"/>
-              <a:t>€100K ARR today. Inbound demand. Live AI pilot. Capital removes the bottleneck and compresses the timeline 3x.</a:t>
+                  <a:srgbClr val="6B7B8D"/>
+                </a:solidFill>
+                <a:latin typeface="Calibri"/>
+              </a:defRPr>
+            </a:pPr>
+            <a:r>
+              <a:t>We're asking for what we need, not what we can get. The product is live. The clients are inbound. We need two hires and time.</a:t>
             </a:r>
           </a:p>
         </p:txBody>
@@ -9318,7 +9385,7 @@
               </a:defRPr>
             </a:pPr>
             <a:r>
-              <a:t>€100K ARR  |  Live AI Agents  |  Inbound Demand  |  35-Lead Pipeline</a:t>
+              <a:t>€100K ARR  |  Live AI Agents  |  Inbound Demand  |  Two Hires to 3x</a:t>
             </a:r>
           </a:p>
         </p:txBody>
@@ -11624,7 +11691,7 @@
         <p:spPr>
           <a:xfrm>
             <a:off x="8321040" y="5303520"/>
-            <a:ext cx="2743200" cy="640080"/>
+            <a:ext cx="2743200" cy="523220"/>
           </a:xfrm>
           <a:prstGeom prst="rect">
             <a:avLst/>
@@ -11646,8 +11713,14 @@
               </a:defRPr>
             </a:pPr>
             <a:r>
+              <a:rPr dirty="0"/>
               <a:t>Replaces: Data Engineer</a:t>
             </a:r>
+            <a:r>
+              <a:rPr lang="en-US" dirty="0"/>
+              <a:t> + Analytics Engineer</a:t>
+            </a:r>
+            <a:endParaRPr dirty="0"/>
           </a:p>
         </p:txBody>
       </p:sp>
@@ -12218,7 +12291,7 @@
         <p:spPr>
           <a:xfrm>
             <a:off x="731520" y="822960"/>
-            <a:ext cx="10058400" cy="914400"/>
+            <a:ext cx="10058400" cy="584775"/>
           </a:xfrm>
           <a:prstGeom prst="rect">
             <a:avLst/>
@@ -12240,7 +12313,16 @@
               </a:defRPr>
             </a:pPr>
             <a:r>
-              <a:t>Why We Need the Coding Agent — And Why Funding Accelerates It</a:t>
+              <a:rPr dirty="0"/>
+              <a:t>Founder</a:t>
+            </a:r>
+            <a:r>
+              <a:rPr lang="en-US" dirty="0"/>
+              <a:t>s</a:t>
+            </a:r>
+            <a:r>
+              <a:rPr dirty="0"/>
+              <a:t> Do Everything — That's the Bottleneck</a:t>
             </a:r>
           </a:p>
         </p:txBody>
@@ -12372,7 +12454,7 @@
               </a:defRPr>
             </a:pPr>
             <a:r>
-              <a:t>Internal coding agents assist but can't fully automate</a:t>
+              <a:t>QA testing and reliability work competes with features</a:t>
             </a:r>
           </a:p>
           <a:p>
@@ -12388,7 +12470,7 @@
               </a:defRPr>
             </a:pPr>
             <a:r>
-              <a:t>Each new client = weeks of model customization</a:t>
+              <a:t>Each new client = weeks of custom setup</a:t>
             </a:r>
           </a:p>
           <a:p>
@@ -12404,7 +12486,7 @@
               </a:defRPr>
             </a:pPr>
             <a:r>
-              <a:t>Feature development competes with client onboarding</a:t>
+              <a:t>No dedicated person for agent training or core features</a:t>
             </a:r>
           </a:p>
           <a:p>
@@ -12568,7 +12650,7 @@
               </a:defRPr>
             </a:pPr>
             <a:r>
-              <a:t>dbt model generation from schema detection</a:t>
+              <a:t>QA testing automated — reliability built in</a:t>
             </a:r>
           </a:p>
           <a:p>
@@ -12584,7 +12666,7 @@
               </a:defRPr>
             </a:pPr>
             <a:r>
-              <a:t>Ingestion pipelines auto-configured per source</a:t>
+              <a:t>Ad Tech expert trains agents full-time on core features</a:t>
             </a:r>
           </a:p>
           <a:p>
@@ -12600,7 +12682,7 @@
               </a:defRPr>
             </a:pPr>
             <a:r>
-              <a:t>Validation + testing via CI/CD — no human in the loop</a:t>
+              <a:t>CI/CD pipeline — no manual deployment overhead</a:t>
             </a:r>
           </a:p>
           <a:p>
